--- a/ResolveFlow_AI_Presentation.pptx
+++ b/ResolveFlow_AI_Presentation.pptx
@@ -3250,7 +3250,7 @@
               </a:defRPr>
             </a:pPr>
             <a:r>
-              <a:t>Project Team / Presenter(s): Candidate Student Team | Date: October 2026 | Technology: Python, Streamlit, Multi-Agent State Machine</a:t>
+              <a:t>Project Team: Naman Vyas (@naman00008) &amp; Akshita Mishra (@amakshita0506-dot) | Date: October 2026 | Technology: Python, Streamlit, Multi-Agent State Machine</a:t>
             </a:r>
           </a:p>
         </p:txBody>
